--- a/assets/pptx/catalog-768.pptx
+++ b/assets/pptx/catalog-768.pptx
@@ -3367,7 +3367,7 @@
                 <a:ea typeface="Ebrima"/>
                 <a:cs typeface="Ebrima"/>
               </a:rPr>
-              <a:t>ከአምላክህ እንዳይለይህ (2x)</a:t>
+              <a:t>ከአምላክህ እንዳይለይህ 2x</a:t>
             </a:r>
           </a:p>
           <a:p>
@@ -3511,7 +3511,7 @@
                 <a:ea typeface="Ebrima"/>
                 <a:cs typeface="Ebrima"/>
               </a:rPr>
-              <a:t>ከአምላክህ እንዳይለይህ (2x)</a:t>
+              <a:t>ከአምላክህ እንዳይለይህ 2x</a:t>
             </a:r>
           </a:p>
           <a:p>
@@ -3655,7 +3655,7 @@
                 <a:ea typeface="Ebrima"/>
                 <a:cs typeface="Ebrima"/>
               </a:rPr>
-              <a:t>ከአምላክህ እንዳይለይህ (2x)</a:t>
+              <a:t>ከአምላክህ እንዳይለይህ 2x</a:t>
             </a:r>
           </a:p>
         </p:txBody>
